--- a/backend/app/static/exports/proposal_463f8c4b-cb83-4670-b310-10c6c9a8ab44.pptx
+++ b/backend/app/static/exports/proposal_463f8c4b-cb83-4670-b310-10c6c9a8ab44.pptx
@@ -3656,7 +3656,7 @@
               </a:defRPr>
             </a:pPr>
             <a:r>
-              <a:t>Monthly Investment</a:t>
+              <a:t>Monthly Investment (INR)</a:t>
             </a:r>
           </a:p>
           <a:p>
@@ -3672,7 +3672,7 @@
               </a:defRPr>
             </a:pPr>
             <a:r>
-              <a:t>$1,194.85</a:t>
+              <a:t>₹1,194.85</a:t>
             </a:r>
           </a:p>
           <a:p>
@@ -3685,7 +3685,7 @@
               </a:defRPr>
             </a:pPr>
             <a:r>
-              <a:t>Annualized Total</a:t>
+              <a:t>Annualized Total (INR)</a:t>
             </a:r>
           </a:p>
           <a:p>
@@ -3698,7 +3698,7 @@
               </a:defRPr>
             </a:pPr>
             <a:r>
-              <a:t>$14,338.18</a:t>
+              <a:t>₹14,338.18</a:t>
             </a:r>
           </a:p>
         </p:txBody>
@@ -3737,7 +3737,7 @@
               </a:defRPr>
             </a:pPr>
             <a:r>
-              <a:t>• Compute: $560.64 / mo</a:t>
+              <a:t>• Compute: ₹560.64 / mo</a:t>
             </a:r>
           </a:p>
           <a:p>
@@ -3753,7 +3753,7 @@
               </a:defRPr>
             </a:pPr>
             <a:r>
-              <a:t>• Database: $150.0 / mo</a:t>
+              <a:t>• Database: ₹150.0 / mo</a:t>
             </a:r>
           </a:p>
           <a:p>
@@ -3769,7 +3769,7 @@
               </a:defRPr>
             </a:pPr>
             <a:r>
-              <a:t>• Storage: $1.84 / mo</a:t>
+              <a:t>• Storage: ₹1.84 / mo</a:t>
             </a:r>
           </a:p>
           <a:p>
@@ -3785,7 +3785,7 @@
               </a:defRPr>
             </a:pPr>
             <a:r>
-              <a:t>• Networking: $435.0 / mo</a:t>
+              <a:t>• Networking: ₹435.0 / mo</a:t>
             </a:r>
           </a:p>
           <a:p>
@@ -3801,7 +3801,7 @@
               </a:defRPr>
             </a:pPr>
             <a:r>
-              <a:t>• Cache: $32.0 / mo</a:t>
+              <a:t>• Cache: ₹32.0 / mo</a:t>
             </a:r>
           </a:p>
           <a:p>
@@ -3817,7 +3817,7 @@
               </a:defRPr>
             </a:pPr>
             <a:r>
-              <a:t>• Backup: $0.37 / mo</a:t>
+              <a:t>• Backup: ₹0.37 / mo</a:t>
             </a:r>
           </a:p>
           <a:p>
@@ -3833,7 +3833,7 @@
               </a:defRPr>
             </a:pPr>
             <a:r>
-              <a:t>• Ai: $15.0 / mo</a:t>
+              <a:t>• Ai: ₹15.0 / mo</a:t>
             </a:r>
           </a:p>
         </p:txBody>
@@ -4122,65 +4122,7 @@
               </a:defRPr>
             </a:pPr>
             <a:r>
-              <a:t>Original Cost: $1,194.85 | Optimized Cost: $918.09</a:t>
-            </a:r>
-          </a:p>
-          <a:p>
-            <a:pPr>
-              <a:defRPr sz="1800">
-                <a:solidFill>
-                  <a:srgbClr val="FFFFFF"/>
-                </a:solidFill>
-                <a:latin typeface="Helvetica"/>
-              </a:defRPr>
-            </a:pPr>
-            <a:r>
-              <a:t>• Optimization: Resize standard compute nodes and apply VM Auto-Shutdown schedules during off-peak hours (10 PM to 6 AM).</a:t>
-            </a:r>
-          </a:p>
-          <a:p>
-            <a:pPr>
-              <a:spcAft>
-                <a:spcPts val="800"/>
-              </a:spcAft>
-              <a:defRPr sz="1400">
-                <a:solidFill>
-                  <a:srgbClr val="94A3B8"/>
-                </a:solidFill>
-                <a:latin typeface="Helvetica"/>
-              </a:defRPr>
-            </a:pPr>
-            <a:r>
-              <a:t>  Savings: $224.26/mo | Trade-offs: Slightly longer startup latency for developers working in night shifts.</a:t>
-            </a:r>
-          </a:p>
-          <a:p>
-            <a:pPr>
-              <a:defRPr sz="1800">
-                <a:solidFill>
-                  <a:srgbClr val="FFFFFF"/>
-                </a:solidFill>
-                <a:latin typeface="Helvetica"/>
-              </a:defRPr>
-            </a:pPr>
-            <a:r>
-              <a:t>• Optimization: Shift from Multi-Region Geo-Replication to Single-Region LRS with periodic read-replicas.</a:t>
-            </a:r>
-          </a:p>
-          <a:p>
-            <a:pPr>
-              <a:spcAft>
-                <a:spcPts val="800"/>
-              </a:spcAft>
-              <a:defRPr sz="1400">
-                <a:solidFill>
-                  <a:srgbClr val="94A3B8"/>
-                </a:solidFill>
-                <a:latin typeface="Helvetica"/>
-              </a:defRPr>
-            </a:pPr>
-            <a:r>
-              <a:t>  Savings: $52.5/mo | Trade-offs: Increased Recovery Point Objective (RPO) from 5 minutes to 1 hour in region disaster.</a:t>
+              <a:t>Original Cost: ₹1,194.85 | Optimized Cost: ₹1,194.85</a:t>
             </a:r>
           </a:p>
         </p:txBody>
